--- a/outsystems/niveau-1/deel-06/slidedeck.pptx
+++ b/outsystems/niveau-1/deel-06/slidedeck.pptx
@@ -3212,8 +3212,8 @@
         </p:nvSpPr>
         <p:spPr>
           <a:xfrm>
-            <a:off x="640080" y="457200"/>
-            <a:ext cx="10881360" cy="731520"/>
+            <a:off x="640080" y="365760"/>
+            <a:ext cx="10881360" cy="640080"/>
           </a:xfrm>
           <a:prstGeom prst="rect">
             <a:avLst/>
@@ -3228,7 +3228,7 @@
           <a:p>
             <a:pPr algn="l"/>
             <a:r>
-              <a:rPr sz="2600" b="1">
+              <a:rPr sz="2400" b="1">
                 <a:solidFill>
                   <a:srgbClr val="14213D"/>
                 </a:solidFill>
@@ -3248,8 +3248,8 @@
           <p:nvPr/>
         </p:nvGraphicFramePr>
         <p:xfrm>
-          <a:off x="640080" y="1371600"/>
-          <a:ext cx="10881360" cy="1645919"/>
+          <a:off x="640080" y="1097280"/>
+          <a:ext cx="10881360" cy="1371600"/>
         </p:xfrm>
         <a:graphic>
           <a:graphicData uri="http://schemas.openxmlformats.org/drawingml/2006/table">
@@ -3262,7 +3262,7 @@
                 <a:gridCol w="3627120"/>
                 <a:gridCol w="3627120"/>
               </a:tblGrid>
-              <a:tr h="548639">
+              <a:tr h="457200">
                 <a:tc>
                   <a:txBody>
                     <a:bodyPr/>
@@ -3277,7 +3277,7 @@
                     <a:lstStyle/>
                     <a:p>
                       <a:r>
-                        <a:rPr sz="1600" b="1"/>
+                        <a:rPr sz="1400" b="1"/>
                         <a:t>O11</a:t>
                       </a:r>
                     </a:p>
@@ -3290,7 +3290,7 @@
                     <a:lstStyle/>
                     <a:p>
                       <a:r>
-                        <a:rPr sz="1600" b="1"/>
+                        <a:rPr sz="1400" b="1"/>
                         <a:t>ODC</a:t>
                       </a:r>
                     </a:p>
@@ -3298,14 +3298,14 @@
                   <a:tcPr/>
                 </a:tc>
               </a:tr>
-              <a:tr h="548639">
+              <a:tr h="457200">
                 <a:tc>
                   <a:txBody>
                     <a:bodyPr/>
                     <a:lstStyle/>
                     <a:p>
                       <a:r>
-                        <a:rPr sz="1600"/>
+                        <a:rPr sz="1400"/>
                         <a:t>Aggregate/Advanced SQL</a:t>
                       </a:r>
                     </a:p>
@@ -3318,7 +3318,7 @@
                     <a:lstStyle/>
                     <a:p>
                       <a:r>
-                        <a:rPr sz="1600"/>
+                        <a:rPr sz="1400"/>
                         <a:t>Functioneel identiek</a:t>
                       </a:r>
                     </a:p>
@@ -3331,7 +3331,7 @@
                     <a:lstStyle/>
                     <a:p>
                       <a:r>
-                        <a:rPr sz="1600"/>
+                        <a:rPr sz="1400"/>
                         <a:t>Functioneel identiek</a:t>
                       </a:r>
                     </a:p>
@@ -3339,14 +3339,14 @@
                   <a:tcPr/>
                 </a:tc>
               </a:tr>
-              <a:tr h="548641">
+              <a:tr h="457200">
                 <a:tc>
                   <a:txBody>
                     <a:bodyPr/>
                     <a:lstStyle/>
                     <a:p>
                       <a:r>
-                        <a:rPr sz="1600"/>
+                        <a:rPr sz="1400"/>
                         <a:t>Externe database via Advanced SQL</a:t>
                       </a:r>
                     </a:p>
@@ -3359,7 +3359,7 @@
                     <a:lstStyle/>
                     <a:p>
                       <a:r>
-                        <a:rPr sz="1600"/>
+                        <a:rPr sz="1400"/>
                         <a:t>Vaak mogelijk</a:t>
                       </a:r>
                     </a:p>
@@ -3372,7 +3372,7 @@
                     <a:lstStyle/>
                     <a:p>
                       <a:r>
-                        <a:rPr sz="1600"/>
+                        <a:rPr sz="1400"/>
                         <a:t>Primair platformbeheerde database</a:t>
                       </a:r>
                     </a:p>
@@ -3526,8 +3526,8 @@
         </p:nvSpPr>
         <p:spPr>
           <a:xfrm>
-            <a:off x="640080" y="548640"/>
-            <a:ext cx="10881360" cy="914400"/>
+            <a:off x="640080" y="457200"/>
+            <a:ext cx="10881360" cy="822960"/>
           </a:xfrm>
           <a:prstGeom prst="rect">
             <a:avLst/>
@@ -3719,8 +3719,8 @@
         </p:nvSpPr>
         <p:spPr>
           <a:xfrm>
-            <a:off x="640080" y="548640"/>
-            <a:ext cx="10881360" cy="914400"/>
+            <a:off x="640080" y="457200"/>
+            <a:ext cx="10881360" cy="822960"/>
           </a:xfrm>
           <a:prstGeom prst="rect">
             <a:avLst/>
@@ -3754,8 +3754,8 @@
         </p:nvSpPr>
         <p:spPr>
           <a:xfrm>
-            <a:off x="822960" y="1737360"/>
-            <a:ext cx="10515600" cy="4114800"/>
+            <a:off x="640080" y="1463040"/>
+            <a:ext cx="5029200" cy="4937760"/>
           </a:xfrm>
           <a:prstGeom prst="rect">
             <a:avLst/>
@@ -3770,7 +3770,7 @@
           <a:p>
             <a:pPr algn="l"/>
             <a:r>
-              <a:rPr sz="2000" b="0">
+              <a:rPr sz="1700" b="0">
                 <a:solidFill>
                   <a:srgbClr val="14213D"/>
                 </a:solidFill>
@@ -3782,7 +3782,7 @@
           <a:p>
             <a:pPr algn="l"/>
             <a:r>
-              <a:rPr sz="2000" b="0">
+              <a:rPr sz="1700" b="0">
                 <a:solidFill>
                   <a:srgbClr val="14213D"/>
                 </a:solidFill>
@@ -3794,7 +3794,7 @@
           <a:p>
             <a:pPr algn="l"/>
             <a:r>
-              <a:rPr sz="2000" b="0">
+              <a:rPr sz="1700" b="0">
                 <a:solidFill>
                   <a:srgbClr val="14213D"/>
                 </a:solidFill>
@@ -3805,41 +3805,30 @@
           </a:p>
         </p:txBody>
       </p:sp>
-      <p:sp>
-        <p:nvSpPr>
-          <p:cNvPr id="4" name="TextBox 3"/>
-          <p:cNvSpPr txBox="1"/>
+      <p:pic>
+        <p:nvPicPr>
+          <p:cNvPr id="4" name="Picture 3" descr="figuur-6-1.png"/>
+          <p:cNvPicPr>
+            <a:picLocks noChangeAspect="1"/>
+          </p:cNvPicPr>
           <p:nvPr/>
-        </p:nvSpPr>
+        </p:nvPicPr>
+        <p:blipFill>
+          <a:blip r:embed="rId2"/>
+          <a:stretch>
+            <a:fillRect/>
+          </a:stretch>
+        </p:blipFill>
         <p:spPr>
           <a:xfrm>
-            <a:off x="822960" y="5943600"/>
-            <a:ext cx="10515600" cy="731520"/>
+            <a:off x="5852160" y="2519825"/>
+            <a:ext cx="5669280" cy="2915629"/>
           </a:xfrm>
           <a:prstGeom prst="rect">
             <a:avLst/>
           </a:prstGeom>
-          <a:noFill/>
         </p:spPr>
-        <p:txBody>
-          <a:bodyPr wrap="square">
-            <a:spAutoFit/>
-          </a:bodyPr>
-          <a:lstStyle/>
-          <a:p>
-            <a:pPr algn="l"/>
-            <a:r>
-              <a:rPr sz="1300" b="0">
-                <a:solidFill>
-                  <a:srgbClr val="999999"/>
-                </a:solidFill>
-                <a:latin typeface="DM Sans"/>
-              </a:rPr>
-              <a:t>[FIGUUR 6-1: Aggregate-editor met SQL-preview naast elkaar]</a:t>
-            </a:r>
-          </a:p>
-        </p:txBody>
-      </p:sp>
+      </p:pic>
     </p:spTree>
   </p:cSld>
   <p:clrMapOvr>
@@ -3935,8 +3924,8 @@
         </p:nvSpPr>
         <p:spPr>
           <a:xfrm>
-            <a:off x="640080" y="548640"/>
-            <a:ext cx="10881360" cy="914400"/>
+            <a:off x="640080" y="457200"/>
+            <a:ext cx="10881360" cy="822960"/>
           </a:xfrm>
           <a:prstGeom prst="rect">
             <a:avLst/>
@@ -4417,8 +4406,8 @@
         </p:nvSpPr>
         <p:spPr>
           <a:xfrm>
-            <a:off x="640080" y="548640"/>
-            <a:ext cx="10881360" cy="914400"/>
+            <a:off x="640080" y="457200"/>
+            <a:ext cx="10881360" cy="822960"/>
           </a:xfrm>
           <a:prstGeom prst="rect">
             <a:avLst/>
